--- a/Opportunity_Scout_AI_Presentation.pptx
+++ b/Opportunity_Scout_AI_Presentation.pptx
@@ -15218,7 +15218,20 @@
                   <a:srgbClr val="A8C4F0"/>
                 </a:solidFill>
               </a:rPr>
-              <a:t> Next Steps:</a:t>
+              <a:t> Next Steps </a:t>
+            </a:r>
+          </a:p>
+          <a:p>
+            <a:pPr marL="0" indent="0">
+              <a:buNone/>
+            </a:pPr>
+            <a:r>
+              <a:rPr lang="en-US" sz="1100" b="1" dirty="0">
+                <a:solidFill>
+                  <a:srgbClr val="A8C4F0"/>
+                </a:solidFill>
+              </a:rPr>
+              <a:t>(Future Plans):</a:t>
             </a:r>
             <a:endParaRPr lang="en-US" sz="1100" dirty="0"/>
           </a:p>
@@ -16628,7 +16641,7 @@
                   <a:srgbClr val="93B4E8"/>
                 </a:solidFill>
               </a:rPr>
-              <a:t> Gathers 80+ live signals from Google Trends, World Bank, Reddit &amp; GDELT</a:t>
+              <a:t> Gathers 70+ live signals from Google Trends, World Bank, Reddit &amp; GDELT</a:t>
             </a:r>
             <a:endParaRPr lang="en-US" sz="1050" dirty="0"/>
           </a:p>
